--- a/04 感測器實作/04.01 溫溼度感測器實作/04.01溫溼度感測器實作_擴充版.pptx
+++ b/04 感測器實作/04.01 溫溼度感測器實作/04.01溫溼度感測器實作_擴充版.pptx
@@ -5,7 +5,7 @@
     <p:sldMasterId id="2147483648" r:id="rId1"/>
   </p:sldMasterIdLst>
   <p:notesMasterIdLst>
-    <p:notesMasterId r:id="rId29"/>
+    <p:notesMasterId r:id="rId30"/>
   </p:notesMasterIdLst>
   <p:sldIdLst>
     <p:sldId id="256" r:id="rId2"/>
@@ -21,20 +21,21 @@
     <p:sldId id="263" r:id="rId12"/>
     <p:sldId id="264" r:id="rId13"/>
     <p:sldId id="273" r:id="rId14"/>
-    <p:sldId id="274" r:id="rId15"/>
-    <p:sldId id="275" r:id="rId16"/>
-    <p:sldId id="276" r:id="rId17"/>
-    <p:sldId id="277" r:id="rId18"/>
-    <p:sldId id="278" r:id="rId19"/>
-    <p:sldId id="279" r:id="rId20"/>
-    <p:sldId id="280" r:id="rId21"/>
-    <p:sldId id="281" r:id="rId22"/>
-    <p:sldId id="282" r:id="rId23"/>
-    <p:sldId id="283" r:id="rId24"/>
-    <p:sldId id="284" r:id="rId25"/>
-    <p:sldId id="285" r:id="rId26"/>
-    <p:sldId id="286" r:id="rId27"/>
-    <p:sldId id="287" r:id="rId28"/>
+    <p:sldId id="291" r:id="rId15"/>
+    <p:sldId id="274" r:id="rId16"/>
+    <p:sldId id="275" r:id="rId17"/>
+    <p:sldId id="276" r:id="rId18"/>
+    <p:sldId id="277" r:id="rId19"/>
+    <p:sldId id="278" r:id="rId20"/>
+    <p:sldId id="279" r:id="rId21"/>
+    <p:sldId id="280" r:id="rId22"/>
+    <p:sldId id="281" r:id="rId23"/>
+    <p:sldId id="282" r:id="rId24"/>
+    <p:sldId id="283" r:id="rId25"/>
+    <p:sldId id="284" r:id="rId26"/>
+    <p:sldId id="285" r:id="rId27"/>
+    <p:sldId id="286" r:id="rId28"/>
+    <p:sldId id="287" r:id="rId29"/>
   </p:sldIdLst>
   <p:sldSz cx="12192000" cy="6858000"/>
   <p:notesSz cx="6858000" cy="9144000"/>
@@ -272,7 +273,7 @@
       <p15:sldGuideLst xmlns:p15="http://schemas.microsoft.com/office/powerpoint/2012/main"/>
     </p:ext>
     <p:ext uri="GoogleSlidesCustomDataVersion2">
-      <go:slidesCustomData xmlns="" xmlns:mc="http://schemas.openxmlformats.org/markup-compatibility/2006" xmlns:mv="urn:schemas-microsoft-com:mac:vml" xmlns:c="http://schemas.openxmlformats.org/drawingml/2006/chart" xmlns:dgm="http://schemas.openxmlformats.org/drawingml/2006/diagram" xmlns:o="urn:schemas-microsoft-com:office:office" xmlns:v="urn:schemas-microsoft-com:vml" xmlns:pvml="urn:schemas-microsoft-com:office:powerpoint" xmlns:com="http://schemas.openxmlformats.org/drawingml/2006/compatibility" xmlns:p14="http://schemas.microsoft.com/office/powerpoint/2010/main" xmlns:p15="http://schemas.microsoft.com/office/powerpoint/2012/main" xmlns:ahyp="http://schemas.microsoft.com/office/drawing/2018/hyperlinkcolor" xmlns:go="http://customooxmlschemas.google.com/" r:id="rId37" roundtripDataSignature="AMtx7miWT8KKVVoOnpIIkx4z8c8oSh2ZlA=="/>
+      <go:slidesCustomData xmlns:go="http://customooxmlschemas.google.com/" xmlns:ahyp="http://schemas.microsoft.com/office/drawing/2018/hyperlinkcolor" xmlns:p15="http://schemas.microsoft.com/office/powerpoint/2012/main" xmlns:p14="http://schemas.microsoft.com/office/powerpoint/2010/main" xmlns:com="http://schemas.openxmlformats.org/drawingml/2006/compatibility" xmlns:pvml="urn:schemas-microsoft-com:office:powerpoint" xmlns:v="urn:schemas-microsoft-com:vml" xmlns:o="urn:schemas-microsoft-com:office:office" xmlns:dgm="http://schemas.openxmlformats.org/drawingml/2006/diagram" xmlns:c="http://schemas.openxmlformats.org/drawingml/2006/chart" xmlns:mv="urn:schemas-microsoft-com:mac:vml" xmlns:mc="http://schemas.openxmlformats.org/markup-compatibility/2006" xmlns="" r:id="rId37" roundtripDataSignature="AMtx7miWT8KKVVoOnpIIkx4z8c8oSh2ZlA=="/>
     </p:ext>
   </p:extLst>
 </p:presentation>
@@ -1417,8 +1418,8 @@
         </p:nvSpPr>
         <p:spPr>
           <a:xfrm>
-            <a:off x="1143225" y="685800"/>
-            <a:ext cx="4572225" cy="3429000"/>
+            <a:off x="381000" y="685800"/>
+            <a:ext cx="6096000" cy="3429000"/>
           </a:xfrm>
           <a:custGeom>
             <a:avLst/>
@@ -18775,10 +18776,10 @@
               <a:buChar char="•"/>
             </a:pPr>
             <a:r>
-              <a:rPr lang="zh-TW" sz="2800"/>
+              <a:rPr lang="zh-TW" sz="2800" dirty="0"/>
               <a:t>步驟</a:t>
             </a:r>
-            <a:endParaRPr sz="2800"/>
+            <a:endParaRPr sz="2800" dirty="0"/>
           </a:p>
           <a:p>
             <a:pPr marL="457177" lvl="0" indent="-457177" algn="l" rtl="0">
@@ -18798,10 +18799,10 @@
               <a:buChar char="•"/>
             </a:pPr>
             <a:r>
-              <a:rPr lang="zh-TW" sz="2800"/>
+              <a:rPr lang="zh-TW" sz="2800" dirty="0"/>
               <a:t>1.已完成溫溼度數值讀取積木(請參考前面投影片)</a:t>
             </a:r>
-            <a:endParaRPr/>
+            <a:endParaRPr dirty="0"/>
           </a:p>
           <a:p>
             <a:pPr marL="457177" lvl="0" indent="-457177" algn="l" rtl="0">
@@ -18821,10 +18822,14 @@
               <a:buChar char="•"/>
             </a:pPr>
             <a:r>
+              <a:rPr lang="zh-TW" sz="2800" dirty="0"/>
+              <a:t>2.設定wifi</a:t>
+            </a:r>
+            <a:r>
               <a:rPr lang="zh-TW" sz="2800"/>
-              <a:t>2.設定wifi連線積木(請參考前面投影片)</a:t>
+              <a:t>連線積木</a:t>
             </a:r>
-            <a:endParaRPr/>
+            <a:endParaRPr dirty="0"/>
           </a:p>
           <a:p>
             <a:pPr marL="457177" lvl="0" indent="-457177" algn="l" rtl="0">
@@ -18844,10 +18849,10 @@
               <a:buChar char="•"/>
             </a:pPr>
             <a:r>
-              <a:rPr lang="zh-TW" sz="2800"/>
+              <a:rPr lang="zh-TW" sz="2800" dirty="0"/>
               <a:t>3.註冊AdafruitIO：https://io.adafruit.com/</a:t>
             </a:r>
-            <a:endParaRPr/>
+            <a:endParaRPr dirty="0"/>
           </a:p>
           <a:p>
             <a:pPr marL="457177" lvl="0" indent="-457177" algn="l" rtl="0">
@@ -18867,10 +18872,10 @@
               <a:buChar char="•"/>
             </a:pPr>
             <a:r>
-              <a:rPr lang="zh-TW" sz="2800"/>
+              <a:rPr lang="zh-TW" sz="2800" dirty="0"/>
               <a:t>4.加入”連線到MQTT”積木並設定</a:t>
             </a:r>
-            <a:endParaRPr sz="2800"/>
+            <a:endParaRPr sz="2800" dirty="0"/>
           </a:p>
           <a:p>
             <a:pPr marL="457177" lvl="0" indent="-457177" algn="l" rtl="0">
@@ -18890,10 +18895,10 @@
               <a:buChar char="•"/>
             </a:pPr>
             <a:r>
-              <a:rPr lang="zh-TW" sz="2800"/>
+              <a:rPr lang="zh-TW" sz="2800" dirty="0"/>
               <a:t>5.加入”訂閱Topic”積木</a:t>
             </a:r>
-            <a:endParaRPr sz="2800"/>
+            <a:endParaRPr sz="2800" dirty="0"/>
           </a:p>
           <a:p>
             <a:pPr marL="457177" lvl="0" indent="-457177" algn="l" rtl="0">
@@ -18913,10 +18918,10 @@
               <a:buChar char="•"/>
             </a:pPr>
             <a:r>
-              <a:rPr lang="zh-TW" sz="2800"/>
+              <a:rPr lang="zh-TW" sz="2800" dirty="0"/>
               <a:t>6.加入”發布Topic”積木</a:t>
             </a:r>
-            <a:endParaRPr sz="2800"/>
+            <a:endParaRPr sz="2800" dirty="0"/>
           </a:p>
         </p:txBody>
       </p:sp>
@@ -18929,6 +18934,196 @@
 </file>
 
 <file path=ppt/slides/slide14.xml><?xml version="1.0" encoding="utf-8"?>
+<p:sld xmlns:a="http://schemas.openxmlformats.org/drawingml/2006/main" xmlns:r="http://schemas.openxmlformats.org/officeDocument/2006/relationships" xmlns:p="http://schemas.openxmlformats.org/presentationml/2006/main">
+  <p:cSld>
+    <p:spTree>
+      <p:nvGrpSpPr>
+        <p:cNvPr id="1" name=""/>
+        <p:cNvGrpSpPr/>
+        <p:nvPr/>
+      </p:nvGrpSpPr>
+      <p:grpSpPr>
+        <a:xfrm>
+          <a:off x="0" y="0"/>
+          <a:ext cx="0" cy="0"/>
+          <a:chOff x="0" y="0"/>
+          <a:chExt cx="0" cy="0"/>
+        </a:xfrm>
+      </p:grpSpPr>
+      <p:sp>
+        <p:nvSpPr>
+          <p:cNvPr id="5" name="標題 4">
+            <a:extLst>
+              <a:ext uri="{FF2B5EF4-FFF2-40B4-BE49-F238E27FC236}">
+                <a16:creationId xmlns:a16="http://schemas.microsoft.com/office/drawing/2014/main" id="{0649AB39-8281-4070-9F8B-AF62FF27595F}"/>
+              </a:ext>
+            </a:extLst>
+          </p:cNvPr>
+          <p:cNvSpPr>
+            <a:spLocks noGrp="1"/>
+          </p:cNvSpPr>
+          <p:nvPr>
+            <p:ph type="title"/>
+          </p:nvPr>
+        </p:nvSpPr>
+        <p:spPr/>
+        <p:txBody>
+          <a:bodyPr/>
+          <a:lstStyle/>
+          <a:p>
+            <a:r>
+              <a:rPr lang="zh-TW" altLang="en-US" dirty="0"/>
+              <a:t>設定</a:t>
+            </a:r>
+            <a:r>
+              <a:rPr lang="en-US" altLang="zh-TW" dirty="0" err="1"/>
+              <a:t>wifi</a:t>
+            </a:r>
+            <a:r>
+              <a:rPr lang="zh-TW" altLang="en-US" dirty="0"/>
+              <a:t>連線積木</a:t>
+            </a:r>
+          </a:p>
+        </p:txBody>
+      </p:sp>
+      <p:sp>
+        <p:nvSpPr>
+          <p:cNvPr id="6" name="文字版面配置區 5">
+            <a:extLst>
+              <a:ext uri="{FF2B5EF4-FFF2-40B4-BE49-F238E27FC236}">
+                <a16:creationId xmlns:a16="http://schemas.microsoft.com/office/drawing/2014/main" id="{79483545-412D-4742-980A-42A36DEBE629}"/>
+              </a:ext>
+            </a:extLst>
+          </p:cNvPr>
+          <p:cNvSpPr>
+            <a:spLocks noGrp="1"/>
+          </p:cNvSpPr>
+          <p:nvPr>
+            <p:ph type="body" idx="1"/>
+          </p:nvPr>
+        </p:nvSpPr>
+        <p:spPr/>
+        <p:txBody>
+          <a:bodyPr>
+            <a:normAutofit/>
+          </a:bodyPr>
+          <a:lstStyle/>
+          <a:p>
+            <a:r>
+              <a:rPr lang="en-US" altLang="zh-TW" sz="2400" dirty="0" err="1"/>
+              <a:t>wifi</a:t>
+            </a:r>
+            <a:endParaRPr lang="zh-TW" altLang="en-US" sz="2400" dirty="0"/>
+          </a:p>
+        </p:txBody>
+      </p:sp>
+      <p:pic>
+        <p:nvPicPr>
+          <p:cNvPr id="8" name="圖片 7">
+            <a:extLst>
+              <a:ext uri="{FF2B5EF4-FFF2-40B4-BE49-F238E27FC236}">
+                <a16:creationId xmlns:a16="http://schemas.microsoft.com/office/drawing/2014/main" id="{1BA040B4-C2CF-4D79-A650-F085C9F230A2}"/>
+              </a:ext>
+            </a:extLst>
+          </p:cNvPr>
+          <p:cNvPicPr>
+            <a:picLocks noChangeAspect="1"/>
+          </p:cNvPicPr>
+          <p:nvPr/>
+        </p:nvPicPr>
+        <p:blipFill rotWithShape="1">
+          <a:blip r:embed="rId2"/>
+          <a:srcRect b="12995"/>
+          <a:stretch/>
+        </p:blipFill>
+        <p:spPr>
+          <a:xfrm>
+            <a:off x="1409252" y="2287458"/>
+            <a:ext cx="3362253" cy="4229720"/>
+          </a:xfrm>
+          <a:prstGeom prst="rect">
+            <a:avLst/>
+          </a:prstGeom>
+        </p:spPr>
+      </p:pic>
+      <p:pic>
+        <p:nvPicPr>
+          <p:cNvPr id="10" name="圖片 9">
+            <a:extLst>
+              <a:ext uri="{FF2B5EF4-FFF2-40B4-BE49-F238E27FC236}">
+                <a16:creationId xmlns:a16="http://schemas.microsoft.com/office/drawing/2014/main" id="{F81146FF-D004-47A5-80F4-AF4F0CEDB160}"/>
+              </a:ext>
+            </a:extLst>
+          </p:cNvPr>
+          <p:cNvPicPr>
+            <a:picLocks noChangeAspect="1"/>
+          </p:cNvPicPr>
+          <p:nvPr/>
+        </p:nvPicPr>
+        <p:blipFill>
+          <a:blip r:embed="rId3"/>
+          <a:stretch>
+            <a:fillRect/>
+          </a:stretch>
+        </p:blipFill>
+        <p:spPr>
+          <a:xfrm>
+            <a:off x="6096000" y="1920841"/>
+            <a:ext cx="5911891" cy="3228892"/>
+          </a:xfrm>
+          <a:prstGeom prst="rect">
+            <a:avLst/>
+          </a:prstGeom>
+        </p:spPr>
+      </p:pic>
+      <p:cxnSp>
+        <p:nvCxnSpPr>
+          <p:cNvPr id="11" name="Google Shape;246;p18">
+            <a:extLst>
+              <a:ext uri="{FF2B5EF4-FFF2-40B4-BE49-F238E27FC236}">
+                <a16:creationId xmlns:a16="http://schemas.microsoft.com/office/drawing/2014/main" id="{67A57791-BEBD-4728-A64C-9AD810EEC383}"/>
+              </a:ext>
+            </a:extLst>
+          </p:cNvPr>
+          <p:cNvCxnSpPr>
+            <a:cxnSpLocks/>
+          </p:cNvCxnSpPr>
+          <p:nvPr/>
+        </p:nvCxnSpPr>
+        <p:spPr>
+          <a:xfrm>
+            <a:off x="4380807" y="3175462"/>
+            <a:ext cx="1978429" cy="1271847"/>
+          </a:xfrm>
+          <a:prstGeom prst="straightConnector1">
+            <a:avLst/>
+          </a:prstGeom>
+          <a:noFill/>
+          <a:ln w="57150" cap="flat" cmpd="sng">
+            <a:solidFill>
+              <a:srgbClr val="FF0000"/>
+            </a:solidFill>
+            <a:prstDash val="solid"/>
+            <a:round/>
+            <a:headEnd type="none" w="sm" len="sm"/>
+            <a:tailEnd type="triangle" w="med" len="med"/>
+          </a:ln>
+        </p:spPr>
+      </p:cxnSp>
+    </p:spTree>
+    <p:extLst>
+      <p:ext uri="{BB962C8B-B14F-4D97-AF65-F5344CB8AC3E}">
+        <p14:creationId xmlns:p14="http://schemas.microsoft.com/office/powerpoint/2010/main" val="3702476491"/>
+      </p:ext>
+    </p:extLst>
+  </p:cSld>
+  <p:clrMapOvr>
+    <a:masterClrMapping/>
+  </p:clrMapOvr>
+</p:sld>
+</file>
+
+<file path=ppt/slides/slide15.xml><?xml version="1.0" encoding="utf-8"?>
 <p:sld xmlns:a="http://schemas.openxmlformats.org/drawingml/2006/main" xmlns:r="http://schemas.openxmlformats.org/officeDocument/2006/relationships" xmlns:p="http://schemas.openxmlformats.org/presentationml/2006/main">
   <p:cSld>
     <p:spTree>
@@ -19256,7 +19451,7 @@
 </p:sld>
 </file>
 
-<file path=ppt/slides/slide15.xml><?xml version="1.0" encoding="utf-8"?>
+<file path=ppt/slides/slide16.xml><?xml version="1.0" encoding="utf-8"?>
 <p:sld xmlns:a="http://schemas.openxmlformats.org/drawingml/2006/main" xmlns:r="http://schemas.openxmlformats.org/officeDocument/2006/relationships" xmlns:p="http://schemas.openxmlformats.org/presentationml/2006/main">
   <p:cSld>
     <p:spTree>
@@ -19584,7 +19779,7 @@
 </p:sld>
 </file>
 
-<file path=ppt/slides/slide16.xml><?xml version="1.0" encoding="utf-8"?>
+<file path=ppt/slides/slide17.xml><?xml version="1.0" encoding="utf-8"?>
 <p:sld xmlns:a="http://schemas.openxmlformats.org/drawingml/2006/main" xmlns:r="http://schemas.openxmlformats.org/officeDocument/2006/relationships" xmlns:p="http://schemas.openxmlformats.org/presentationml/2006/main">
   <p:cSld>
     <p:spTree>
@@ -19701,10 +19896,10 @@
               <a:buChar char="•"/>
             </a:pPr>
             <a:r>
-              <a:rPr lang="zh-TW" sz="2400"/>
+              <a:rPr lang="zh-TW" sz="2400" dirty="0"/>
               <a:t>MQTT伺服器：io.adafruit.com</a:t>
             </a:r>
-            <a:endParaRPr/>
+            <a:endParaRPr dirty="0"/>
           </a:p>
           <a:p>
             <a:pPr marL="457177" lvl="0" indent="-457177" algn="l" rtl="0">
@@ -19724,10 +19919,10 @@
               <a:buChar char="•"/>
             </a:pPr>
             <a:r>
-              <a:rPr lang="zh-TW" sz="2400"/>
+              <a:rPr lang="zh-TW" sz="2400" dirty="0"/>
               <a:t>連結埠：1883</a:t>
             </a:r>
-            <a:endParaRPr/>
+            <a:endParaRPr dirty="0"/>
           </a:p>
           <a:p>
             <a:pPr marL="457177" lvl="0" indent="-457177" algn="l" rtl="0">
@@ -19747,10 +19942,10 @@
               <a:buChar char="•"/>
             </a:pPr>
             <a:r>
-              <a:rPr lang="zh-TW" sz="2400"/>
+              <a:rPr lang="zh-TW" sz="2400" dirty="0"/>
               <a:t>ID：123(主要區別不同的物聯網設備上傳的資料，可隨意取)</a:t>
             </a:r>
-            <a:endParaRPr/>
+            <a:endParaRPr dirty="0"/>
           </a:p>
           <a:p>
             <a:pPr marL="457177" lvl="0" indent="-457177" algn="l" rtl="0">
@@ -19770,10 +19965,10 @@
               <a:buChar char="•"/>
             </a:pPr>
             <a:r>
-              <a:rPr lang="zh-TW" sz="2400"/>
+              <a:rPr lang="zh-TW" sz="2400" dirty="0"/>
               <a:t>Username：填入自己的Username</a:t>
             </a:r>
-            <a:endParaRPr/>
+            <a:endParaRPr dirty="0"/>
           </a:p>
           <a:p>
             <a:pPr marL="457177" lvl="0" indent="-457177" algn="l" rtl="0">
@@ -19793,10 +19988,10 @@
               <a:buChar char="•"/>
             </a:pPr>
             <a:r>
-              <a:rPr lang="zh-TW" sz="2400"/>
+              <a:rPr lang="zh-TW" sz="2400" dirty="0"/>
               <a:t>Password ：填入Active Key</a:t>
             </a:r>
-            <a:endParaRPr/>
+            <a:endParaRPr dirty="0"/>
           </a:p>
           <a:p>
             <a:pPr marL="457177" lvl="0" indent="-304777" algn="l" rtl="0">
@@ -19815,7 +20010,7 @@
               <a:buSzPts val="2400"/>
               <a:buNone/>
             </a:pPr>
-            <a:endParaRPr sz="2400"/>
+            <a:endParaRPr sz="2400" dirty="0"/>
           </a:p>
           <a:p>
             <a:pPr marL="457177" lvl="0" indent="-338622" algn="l" rtl="0">
@@ -19834,7 +20029,7 @@
               <a:buSzPts val="1867"/>
               <a:buNone/>
             </a:pPr>
-            <a:endParaRPr/>
+            <a:endParaRPr dirty="0"/>
           </a:p>
         </p:txBody>
       </p:sp>
@@ -20075,7 +20270,7 @@
 </p:sld>
 </file>
 
-<file path=ppt/slides/slide17.xml><?xml version="1.0" encoding="utf-8"?>
+<file path=ppt/slides/slide18.xml><?xml version="1.0" encoding="utf-8"?>
 <p:sld xmlns:a="http://schemas.openxmlformats.org/drawingml/2006/main" xmlns:r="http://schemas.openxmlformats.org/officeDocument/2006/relationships" xmlns:p="http://schemas.openxmlformats.org/presentationml/2006/main">
   <p:cSld>
     <p:spTree>
@@ -20192,10 +20387,10 @@
               <a:buChar char="•"/>
             </a:pPr>
             <a:r>
-              <a:rPr lang="zh-TW" sz="2400"/>
+              <a:rPr lang="zh-TW" sz="2400" dirty="0"/>
               <a:t>在adafruitIO網站設定feed→New Groupn→IOT_SMARTHOUSE_LOCAL→feed→temp及humi</a:t>
             </a:r>
-            <a:endParaRPr sz="2400"/>
+            <a:endParaRPr sz="2400" dirty="0"/>
           </a:p>
           <a:p>
             <a:pPr marL="457177" lvl="0" indent="-338622" algn="l" rtl="0">
@@ -20214,7 +20409,7 @@
               <a:buSzPts val="1867"/>
               <a:buNone/>
             </a:pPr>
-            <a:endParaRPr/>
+            <a:endParaRPr dirty="0"/>
           </a:p>
         </p:txBody>
       </p:sp>
@@ -20855,7 +21050,7 @@
 </p:sld>
 </file>
 
-<file path=ppt/slides/slide18.xml><?xml version="1.0" encoding="utf-8"?>
+<file path=ppt/slides/slide19.xml><?xml version="1.0" encoding="utf-8"?>
 <p:sld xmlns:a="http://schemas.openxmlformats.org/drawingml/2006/main" xmlns:r="http://schemas.openxmlformats.org/officeDocument/2006/relationships" xmlns:p="http://schemas.openxmlformats.org/presentationml/2006/main">
   <p:cSld>
     <p:spTree>
@@ -21163,301 +21358,6 @@
           <a:xfrm>
             <a:off x="1631504" y="2558898"/>
             <a:ext cx="7400952" cy="1141619"/>
-          </a:xfrm>
-          <a:prstGeom prst="straightConnector1">
-            <a:avLst/>
-          </a:prstGeom>
-          <a:noFill/>
-          <a:ln w="57150" cap="flat" cmpd="sng">
-            <a:solidFill>
-              <a:srgbClr val="FF0000"/>
-            </a:solidFill>
-            <a:prstDash val="solid"/>
-            <a:round/>
-            <a:headEnd type="none" w="sm" len="sm"/>
-            <a:tailEnd type="triangle" w="med" len="med"/>
-          </a:ln>
-        </p:spPr>
-      </p:cxnSp>
-    </p:spTree>
-  </p:cSld>
-  <p:clrMapOvr>
-    <a:masterClrMapping/>
-  </p:clrMapOvr>
-</p:sld>
-</file>
-
-<file path=ppt/slides/slide19.xml><?xml version="1.0" encoding="utf-8"?>
-<p:sld xmlns:a="http://schemas.openxmlformats.org/drawingml/2006/main" xmlns:r="http://schemas.openxmlformats.org/officeDocument/2006/relationships" xmlns:p="http://schemas.openxmlformats.org/presentationml/2006/main">
-  <p:cSld>
-    <p:spTree>
-      <p:nvGrpSpPr>
-        <p:cNvPr id="1" name="Shape 307"/>
-        <p:cNvGrpSpPr/>
-        <p:nvPr/>
-      </p:nvGrpSpPr>
-      <p:grpSpPr>
-        <a:xfrm>
-          <a:off x="0" y="0"/>
-          <a:ext cx="0" cy="0"/>
-          <a:chOff x="0" y="0"/>
-          <a:chExt cx="0" cy="0"/>
-        </a:xfrm>
-      </p:grpSpPr>
-      <p:pic>
-        <p:nvPicPr>
-          <p:cNvPr id="308" name="Google Shape;308;p23"/>
-          <p:cNvPicPr preferRelativeResize="0"/>
-          <p:nvPr/>
-        </p:nvPicPr>
-        <p:blipFill rotWithShape="1">
-          <a:blip r:embed="rId3">
-            <a:alphaModFix/>
-          </a:blip>
-          <a:srcRect t="9215"/>
-          <a:stretch/>
-        </p:blipFill>
-        <p:spPr>
-          <a:xfrm>
-            <a:off x="5066498" y="1124744"/>
-            <a:ext cx="6536975" cy="5457626"/>
-          </a:xfrm>
-          <a:prstGeom prst="rect">
-            <a:avLst/>
-          </a:prstGeom>
-          <a:noFill/>
-          <a:ln>
-            <a:noFill/>
-          </a:ln>
-        </p:spPr>
-      </p:pic>
-      <p:sp>
-        <p:nvSpPr>
-          <p:cNvPr id="309" name="Google Shape;309;p23"/>
-          <p:cNvSpPr txBox="1">
-            <a:spLocks noGrp="1"/>
-          </p:cNvSpPr>
-          <p:nvPr>
-            <p:ph type="title"/>
-          </p:nvPr>
-        </p:nvSpPr>
-        <p:spPr>
-          <a:xfrm>
-            <a:off x="609600" y="274639"/>
-            <a:ext cx="10972800" cy="1143000"/>
-          </a:xfrm>
-          <a:prstGeom prst="rect">
-            <a:avLst/>
-          </a:prstGeom>
-          <a:noFill/>
-          <a:ln>
-            <a:noFill/>
-          </a:ln>
-        </p:spPr>
-        <p:txBody>
-          <a:bodyPr spcFirstLastPara="1" wrap="square" lIns="91425" tIns="45700" rIns="91425" bIns="45700" anchor="ctr" anchorCtr="0">
-            <a:normAutofit/>
-          </a:bodyPr>
-          <a:lstStyle/>
-          <a:p>
-            <a:pPr marL="0" lvl="0" indent="0" algn="l" rtl="0">
-              <a:lnSpc>
-                <a:spcPct val="100000"/>
-              </a:lnSpc>
-              <a:spcBef>
-                <a:spcPts val="0"/>
-              </a:spcBef>
-              <a:spcAft>
-                <a:spcPts val="0"/>
-              </a:spcAft>
-              <a:buClr>
-                <a:srgbClr val="949494"/>
-              </a:buClr>
-              <a:buSzPts val="4200"/>
-              <a:buFont typeface="Arial"/>
-              <a:buNone/>
-            </a:pPr>
-            <a:r>
-              <a:rPr lang="zh-TW"/>
-              <a:t>加入”訂閱Topic”積木</a:t>
-            </a:r>
-            <a:endParaRPr/>
-          </a:p>
-        </p:txBody>
-      </p:sp>
-      <p:sp>
-        <p:nvSpPr>
-          <p:cNvPr id="310" name="Google Shape;310;p23"/>
-          <p:cNvSpPr txBox="1">
-            <a:spLocks noGrp="1"/>
-          </p:cNvSpPr>
-          <p:nvPr>
-            <p:ph type="body" idx="1"/>
-          </p:nvPr>
-        </p:nvSpPr>
-        <p:spPr>
-          <a:xfrm>
-            <a:off x="609600" y="1268760"/>
-            <a:ext cx="10972800" cy="5010689"/>
-          </a:xfrm>
-          <a:prstGeom prst="rect">
-            <a:avLst/>
-          </a:prstGeom>
-          <a:noFill/>
-          <a:ln>
-            <a:noFill/>
-          </a:ln>
-        </p:spPr>
-        <p:txBody>
-          <a:bodyPr spcFirstLastPara="1" wrap="square" lIns="91425" tIns="45700" rIns="91425" bIns="45700" anchor="t" anchorCtr="0">
-            <a:normAutofit/>
-          </a:bodyPr>
-          <a:lstStyle/>
-          <a:p>
-            <a:pPr marL="457177" lvl="0" indent="-457177" algn="l" rtl="0">
-              <a:lnSpc>
-                <a:spcPct val="100000"/>
-              </a:lnSpc>
-              <a:spcBef>
-                <a:spcPts val="0"/>
-              </a:spcBef>
-              <a:spcAft>
-                <a:spcPts val="0"/>
-              </a:spcAft>
-              <a:buClr>
-                <a:srgbClr val="A5A5A5"/>
-              </a:buClr>
-              <a:buSzPts val="2400"/>
-              <a:buChar char="•"/>
-            </a:pPr>
-            <a:r>
-              <a:rPr lang="zh-TW" sz="2400"/>
-              <a:t>取得”訂閱Topic”積木的資料：</a:t>
-            </a:r>
-            <a:br>
-              <a:rPr lang="zh-TW" sz="2400"/>
-            </a:br>
-            <a:r>
-              <a:rPr lang="zh-TW" sz="2400"/>
-              <a:t>按下 temp→Feed Info→複製</a:t>
-            </a:r>
-            <a:br>
-              <a:rPr lang="zh-TW" sz="2400"/>
-            </a:br>
-            <a:r>
-              <a:rPr lang="zh-TW" sz="2400"/>
-              <a:t>MQTT by key值，貼在”訂閱</a:t>
-            </a:r>
-            <a:br>
-              <a:rPr lang="zh-TW" sz="2400"/>
-            </a:br>
-            <a:r>
-              <a:rPr lang="zh-TW" sz="2400"/>
-              <a:t>Topic”積木中</a:t>
-            </a:r>
-            <a:endParaRPr sz="2400"/>
-          </a:p>
-        </p:txBody>
-      </p:sp>
-      <p:sp>
-        <p:nvSpPr>
-          <p:cNvPr id="311" name="Google Shape;311;p23"/>
-          <p:cNvSpPr/>
-          <p:nvPr/>
-        </p:nvSpPr>
-        <p:spPr>
-          <a:xfrm>
-            <a:off x="5807968" y="6028729"/>
-            <a:ext cx="3456384" cy="496615"/>
-          </a:xfrm>
-          <a:prstGeom prst="rect">
-            <a:avLst/>
-          </a:prstGeom>
-          <a:noFill/>
-          <a:ln w="28575" cap="flat" cmpd="sng">
-            <a:solidFill>
-              <a:srgbClr val="FF0000"/>
-            </a:solidFill>
-            <a:prstDash val="solid"/>
-            <a:round/>
-            <a:headEnd type="none" w="sm" len="sm"/>
-            <a:tailEnd type="none" w="sm" len="sm"/>
-          </a:ln>
-        </p:spPr>
-        <p:txBody>
-          <a:bodyPr spcFirstLastPara="1" wrap="square" lIns="91425" tIns="45700" rIns="91425" bIns="45700" anchor="ctr" anchorCtr="0">
-            <a:noAutofit/>
-          </a:bodyPr>
-          <a:lstStyle/>
-          <a:p>
-            <a:pPr marL="0" marR="0" lvl="0" indent="0" algn="ctr" rtl="0">
-              <a:lnSpc>
-                <a:spcPct val="100000"/>
-              </a:lnSpc>
-              <a:spcBef>
-                <a:spcPts val="0"/>
-              </a:spcBef>
-              <a:spcAft>
-                <a:spcPts val="0"/>
-              </a:spcAft>
-              <a:buClr>
-                <a:schemeClr val="lt1"/>
-              </a:buClr>
-              <a:buSzPts val="1800"/>
-              <a:buFont typeface="Calibri"/>
-              <a:buNone/>
-            </a:pPr>
-            <a:endParaRPr sz="1800" b="0" i="0" u="none" strike="noStrike" cap="none">
-              <a:solidFill>
-                <a:srgbClr val="FFFFFF"/>
-              </a:solidFill>
-              <a:latin typeface="Calibri"/>
-              <a:ea typeface="Calibri"/>
-              <a:cs typeface="Calibri"/>
-              <a:sym typeface="Calibri"/>
-            </a:endParaRPr>
-          </a:p>
-        </p:txBody>
-      </p:sp>
-      <p:pic>
-        <p:nvPicPr>
-          <p:cNvPr id="312" name="Google Shape;312;p23"/>
-          <p:cNvPicPr preferRelativeResize="0"/>
-          <p:nvPr/>
-        </p:nvPicPr>
-        <p:blipFill rotWithShape="1">
-          <a:blip r:embed="rId4">
-            <a:alphaModFix/>
-          </a:blip>
-          <a:srcRect/>
-          <a:stretch/>
-        </p:blipFill>
-        <p:spPr>
-          <a:xfrm>
-            <a:off x="1055440" y="3645024"/>
-            <a:ext cx="2762636" cy="924054"/>
-          </a:xfrm>
-          <a:prstGeom prst="rect">
-            <a:avLst/>
-          </a:prstGeom>
-          <a:noFill/>
-          <a:ln>
-            <a:noFill/>
-          </a:ln>
-        </p:spPr>
-      </p:pic>
-      <p:cxnSp>
-        <p:nvCxnSpPr>
-          <p:cNvPr id="313" name="Google Shape;313;p23"/>
-          <p:cNvCxnSpPr>
-            <a:endCxn id="312" idx="3"/>
-          </p:cNvCxnSpPr>
-          <p:nvPr/>
-        </p:nvCxnSpPr>
-        <p:spPr>
-          <a:xfrm rot="10800000">
-            <a:off x="3818076" y="4107051"/>
-            <a:ext cx="1917900" cy="2058300"/>
           </a:xfrm>
           <a:prstGeom prst="straightConnector1">
             <a:avLst/>
@@ -21658,6 +21558,301 @@
   <p:cSld>
     <p:spTree>
       <p:nvGrpSpPr>
+        <p:cNvPr id="1" name="Shape 307"/>
+        <p:cNvGrpSpPr/>
+        <p:nvPr/>
+      </p:nvGrpSpPr>
+      <p:grpSpPr>
+        <a:xfrm>
+          <a:off x="0" y="0"/>
+          <a:ext cx="0" cy="0"/>
+          <a:chOff x="0" y="0"/>
+          <a:chExt cx="0" cy="0"/>
+        </a:xfrm>
+      </p:grpSpPr>
+      <p:pic>
+        <p:nvPicPr>
+          <p:cNvPr id="308" name="Google Shape;308;p23"/>
+          <p:cNvPicPr preferRelativeResize="0"/>
+          <p:nvPr/>
+        </p:nvPicPr>
+        <p:blipFill rotWithShape="1">
+          <a:blip r:embed="rId3">
+            <a:alphaModFix/>
+          </a:blip>
+          <a:srcRect t="9215"/>
+          <a:stretch/>
+        </p:blipFill>
+        <p:spPr>
+          <a:xfrm>
+            <a:off x="5066498" y="1124744"/>
+            <a:ext cx="6536975" cy="5457626"/>
+          </a:xfrm>
+          <a:prstGeom prst="rect">
+            <a:avLst/>
+          </a:prstGeom>
+          <a:noFill/>
+          <a:ln>
+            <a:noFill/>
+          </a:ln>
+        </p:spPr>
+      </p:pic>
+      <p:sp>
+        <p:nvSpPr>
+          <p:cNvPr id="309" name="Google Shape;309;p23"/>
+          <p:cNvSpPr txBox="1">
+            <a:spLocks noGrp="1"/>
+          </p:cNvSpPr>
+          <p:nvPr>
+            <p:ph type="title"/>
+          </p:nvPr>
+        </p:nvSpPr>
+        <p:spPr>
+          <a:xfrm>
+            <a:off x="609600" y="274639"/>
+            <a:ext cx="10972800" cy="1143000"/>
+          </a:xfrm>
+          <a:prstGeom prst="rect">
+            <a:avLst/>
+          </a:prstGeom>
+          <a:noFill/>
+          <a:ln>
+            <a:noFill/>
+          </a:ln>
+        </p:spPr>
+        <p:txBody>
+          <a:bodyPr spcFirstLastPara="1" wrap="square" lIns="91425" tIns="45700" rIns="91425" bIns="45700" anchor="ctr" anchorCtr="0">
+            <a:normAutofit/>
+          </a:bodyPr>
+          <a:lstStyle/>
+          <a:p>
+            <a:pPr marL="0" lvl="0" indent="0" algn="l" rtl="0">
+              <a:lnSpc>
+                <a:spcPct val="100000"/>
+              </a:lnSpc>
+              <a:spcBef>
+                <a:spcPts val="0"/>
+              </a:spcBef>
+              <a:spcAft>
+                <a:spcPts val="0"/>
+              </a:spcAft>
+              <a:buClr>
+                <a:srgbClr val="949494"/>
+              </a:buClr>
+              <a:buSzPts val="4200"/>
+              <a:buFont typeface="Arial"/>
+              <a:buNone/>
+            </a:pPr>
+            <a:r>
+              <a:rPr lang="zh-TW"/>
+              <a:t>加入”訂閱Topic”積木</a:t>
+            </a:r>
+            <a:endParaRPr/>
+          </a:p>
+        </p:txBody>
+      </p:sp>
+      <p:sp>
+        <p:nvSpPr>
+          <p:cNvPr id="310" name="Google Shape;310;p23"/>
+          <p:cNvSpPr txBox="1">
+            <a:spLocks noGrp="1"/>
+          </p:cNvSpPr>
+          <p:nvPr>
+            <p:ph type="body" idx="1"/>
+          </p:nvPr>
+        </p:nvSpPr>
+        <p:spPr>
+          <a:xfrm>
+            <a:off x="609600" y="1268760"/>
+            <a:ext cx="10972800" cy="5010689"/>
+          </a:xfrm>
+          <a:prstGeom prst="rect">
+            <a:avLst/>
+          </a:prstGeom>
+          <a:noFill/>
+          <a:ln>
+            <a:noFill/>
+          </a:ln>
+        </p:spPr>
+        <p:txBody>
+          <a:bodyPr spcFirstLastPara="1" wrap="square" lIns="91425" tIns="45700" rIns="91425" bIns="45700" anchor="t" anchorCtr="0">
+            <a:normAutofit/>
+          </a:bodyPr>
+          <a:lstStyle/>
+          <a:p>
+            <a:pPr marL="457177" lvl="0" indent="-457177" algn="l" rtl="0">
+              <a:lnSpc>
+                <a:spcPct val="100000"/>
+              </a:lnSpc>
+              <a:spcBef>
+                <a:spcPts val="0"/>
+              </a:spcBef>
+              <a:spcAft>
+                <a:spcPts val="0"/>
+              </a:spcAft>
+              <a:buClr>
+                <a:srgbClr val="A5A5A5"/>
+              </a:buClr>
+              <a:buSzPts val="2400"/>
+              <a:buChar char="•"/>
+            </a:pPr>
+            <a:r>
+              <a:rPr lang="zh-TW" sz="2400"/>
+              <a:t>取得”訂閱Topic”積木的資料：</a:t>
+            </a:r>
+            <a:br>
+              <a:rPr lang="zh-TW" sz="2400"/>
+            </a:br>
+            <a:r>
+              <a:rPr lang="zh-TW" sz="2400"/>
+              <a:t>按下 temp→Feed Info→複製</a:t>
+            </a:r>
+            <a:br>
+              <a:rPr lang="zh-TW" sz="2400"/>
+            </a:br>
+            <a:r>
+              <a:rPr lang="zh-TW" sz="2400"/>
+              <a:t>MQTT by key值，貼在”訂閱</a:t>
+            </a:r>
+            <a:br>
+              <a:rPr lang="zh-TW" sz="2400"/>
+            </a:br>
+            <a:r>
+              <a:rPr lang="zh-TW" sz="2400"/>
+              <a:t>Topic”積木中</a:t>
+            </a:r>
+            <a:endParaRPr sz="2400"/>
+          </a:p>
+        </p:txBody>
+      </p:sp>
+      <p:sp>
+        <p:nvSpPr>
+          <p:cNvPr id="311" name="Google Shape;311;p23"/>
+          <p:cNvSpPr/>
+          <p:nvPr/>
+        </p:nvSpPr>
+        <p:spPr>
+          <a:xfrm>
+            <a:off x="5807968" y="6028729"/>
+            <a:ext cx="3456384" cy="496615"/>
+          </a:xfrm>
+          <a:prstGeom prst="rect">
+            <a:avLst/>
+          </a:prstGeom>
+          <a:noFill/>
+          <a:ln w="28575" cap="flat" cmpd="sng">
+            <a:solidFill>
+              <a:srgbClr val="FF0000"/>
+            </a:solidFill>
+            <a:prstDash val="solid"/>
+            <a:round/>
+            <a:headEnd type="none" w="sm" len="sm"/>
+            <a:tailEnd type="none" w="sm" len="sm"/>
+          </a:ln>
+        </p:spPr>
+        <p:txBody>
+          <a:bodyPr spcFirstLastPara="1" wrap="square" lIns="91425" tIns="45700" rIns="91425" bIns="45700" anchor="ctr" anchorCtr="0">
+            <a:noAutofit/>
+          </a:bodyPr>
+          <a:lstStyle/>
+          <a:p>
+            <a:pPr marL="0" marR="0" lvl="0" indent="0" algn="ctr" rtl="0">
+              <a:lnSpc>
+                <a:spcPct val="100000"/>
+              </a:lnSpc>
+              <a:spcBef>
+                <a:spcPts val="0"/>
+              </a:spcBef>
+              <a:spcAft>
+                <a:spcPts val="0"/>
+              </a:spcAft>
+              <a:buClr>
+                <a:schemeClr val="lt1"/>
+              </a:buClr>
+              <a:buSzPts val="1800"/>
+              <a:buFont typeface="Calibri"/>
+              <a:buNone/>
+            </a:pPr>
+            <a:endParaRPr sz="1800" b="0" i="0" u="none" strike="noStrike" cap="none">
+              <a:solidFill>
+                <a:srgbClr val="FFFFFF"/>
+              </a:solidFill>
+              <a:latin typeface="Calibri"/>
+              <a:ea typeface="Calibri"/>
+              <a:cs typeface="Calibri"/>
+              <a:sym typeface="Calibri"/>
+            </a:endParaRPr>
+          </a:p>
+        </p:txBody>
+      </p:sp>
+      <p:pic>
+        <p:nvPicPr>
+          <p:cNvPr id="312" name="Google Shape;312;p23"/>
+          <p:cNvPicPr preferRelativeResize="0"/>
+          <p:nvPr/>
+        </p:nvPicPr>
+        <p:blipFill rotWithShape="1">
+          <a:blip r:embed="rId4">
+            <a:alphaModFix/>
+          </a:blip>
+          <a:srcRect/>
+          <a:stretch/>
+        </p:blipFill>
+        <p:spPr>
+          <a:xfrm>
+            <a:off x="1055440" y="3645024"/>
+            <a:ext cx="2762636" cy="924054"/>
+          </a:xfrm>
+          <a:prstGeom prst="rect">
+            <a:avLst/>
+          </a:prstGeom>
+          <a:noFill/>
+          <a:ln>
+            <a:noFill/>
+          </a:ln>
+        </p:spPr>
+      </p:pic>
+      <p:cxnSp>
+        <p:nvCxnSpPr>
+          <p:cNvPr id="313" name="Google Shape;313;p23"/>
+          <p:cNvCxnSpPr>
+            <a:endCxn id="312" idx="3"/>
+          </p:cNvCxnSpPr>
+          <p:nvPr/>
+        </p:nvCxnSpPr>
+        <p:spPr>
+          <a:xfrm rot="10800000">
+            <a:off x="3818076" y="4107051"/>
+            <a:ext cx="1917900" cy="2058300"/>
+          </a:xfrm>
+          <a:prstGeom prst="straightConnector1">
+            <a:avLst/>
+          </a:prstGeom>
+          <a:noFill/>
+          <a:ln w="57150" cap="flat" cmpd="sng">
+            <a:solidFill>
+              <a:srgbClr val="FF0000"/>
+            </a:solidFill>
+            <a:prstDash val="solid"/>
+            <a:round/>
+            <a:headEnd type="none" w="sm" len="sm"/>
+            <a:tailEnd type="triangle" w="med" len="med"/>
+          </a:ln>
+        </p:spPr>
+      </p:cxnSp>
+    </p:spTree>
+  </p:cSld>
+  <p:clrMapOvr>
+    <a:masterClrMapping/>
+  </p:clrMapOvr>
+</p:sld>
+</file>
+
+<file path=ppt/slides/slide21.xml><?xml version="1.0" encoding="utf-8"?>
+<p:sld xmlns:a="http://schemas.openxmlformats.org/drawingml/2006/main" xmlns:r="http://schemas.openxmlformats.org/officeDocument/2006/relationships" xmlns:p="http://schemas.openxmlformats.org/presentationml/2006/main">
+  <p:cSld>
+    <p:spTree>
+      <p:nvGrpSpPr>
         <p:cNvPr id="1" name="Shape 317"/>
         <p:cNvGrpSpPr/>
         <p:nvPr/>
@@ -22200,7 +22395,7 @@
 </p:sld>
 </file>
 
-<file path=ppt/slides/slide21.xml><?xml version="1.0" encoding="utf-8"?>
+<file path=ppt/slides/slide22.xml><?xml version="1.0" encoding="utf-8"?>
 <p:sld xmlns:a="http://schemas.openxmlformats.org/drawingml/2006/main" xmlns:r="http://schemas.openxmlformats.org/officeDocument/2006/relationships" xmlns:p="http://schemas.openxmlformats.org/presentationml/2006/main">
   <p:cSld>
     <p:spTree>
@@ -22674,7 +22869,7 @@
 </p:sld>
 </file>
 
-<file path=ppt/slides/slide22.xml><?xml version="1.0" encoding="utf-8"?>
+<file path=ppt/slides/slide23.xml><?xml version="1.0" encoding="utf-8"?>
 <p:sld xmlns:a="http://schemas.openxmlformats.org/drawingml/2006/main" xmlns:r="http://schemas.openxmlformats.org/officeDocument/2006/relationships" xmlns:p="http://schemas.openxmlformats.org/presentationml/2006/main">
   <p:cSld>
     <p:spTree>
@@ -23216,7 +23411,7 @@
 </p:sld>
 </file>
 
-<file path=ppt/slides/slide23.xml><?xml version="1.0" encoding="utf-8"?>
+<file path=ppt/slides/slide24.xml><?xml version="1.0" encoding="utf-8"?>
 <p:sld xmlns:a="http://schemas.openxmlformats.org/drawingml/2006/main" xmlns:r="http://schemas.openxmlformats.org/officeDocument/2006/relationships" xmlns:p="http://schemas.openxmlformats.org/presentationml/2006/main">
   <p:cSld>
     <p:spTree>
@@ -23785,7 +23980,7 @@
 </p:sld>
 </file>
 
-<file path=ppt/slides/slide24.xml><?xml version="1.0" encoding="utf-8"?>
+<file path=ppt/slides/slide25.xml><?xml version="1.0" encoding="utf-8"?>
 <p:sld xmlns:a="http://schemas.openxmlformats.org/drawingml/2006/main" xmlns:r="http://schemas.openxmlformats.org/officeDocument/2006/relationships" xmlns:p="http://schemas.openxmlformats.org/presentationml/2006/main">
   <p:cSld>
     <p:spTree>
@@ -24411,7 +24606,7 @@
 </p:sld>
 </file>
 
-<file path=ppt/slides/slide25.xml><?xml version="1.0" encoding="utf-8"?>
+<file path=ppt/slides/slide26.xml><?xml version="1.0" encoding="utf-8"?>
 <p:sld xmlns:a="http://schemas.openxmlformats.org/drawingml/2006/main" xmlns:r="http://schemas.openxmlformats.org/officeDocument/2006/relationships" xmlns:p="http://schemas.openxmlformats.org/presentationml/2006/main">
   <p:cSld>
     <p:spTree>
@@ -24580,7 +24775,7 @@
 </p:sld>
 </file>
 
-<file path=ppt/slides/slide26.xml><?xml version="1.0" encoding="utf-8"?>
+<file path=ppt/slides/slide27.xml><?xml version="1.0" encoding="utf-8"?>
 <p:sld xmlns:a="http://schemas.openxmlformats.org/drawingml/2006/main" xmlns:r="http://schemas.openxmlformats.org/officeDocument/2006/relationships" xmlns:p="http://schemas.openxmlformats.org/presentationml/2006/main">
   <p:cSld>
     <p:spTree>
@@ -24811,7 +25006,7 @@
 </p:sld>
 </file>
 
-<file path=ppt/slides/slide27.xml><?xml version="1.0" encoding="utf-8"?>
+<file path=ppt/slides/slide28.xml><?xml version="1.0" encoding="utf-8"?>
 <p:sld xmlns:a="http://schemas.openxmlformats.org/drawingml/2006/main" xmlns:r="http://schemas.openxmlformats.org/officeDocument/2006/relationships" xmlns:p="http://schemas.openxmlformats.org/presentationml/2006/main">
   <p:cSld>
     <p:spTree>
